--- a/docs/presentaciones/classes/clase-103-keras-functional-api-y-subclassing-presentacion.pptx
+++ b/docs/presentaciones/classes/clase-103-keras-functional-api-y-subclassing-presentacion.pptx
@@ -4888,7 +4888,254 @@
                 </a:solidFill>
                 <a:latin typeface="Courier New"/>
               </a:rPr>
-              <a:t># Imports y configuración inicial</a:t>
+              <a:t>import numpy as np</a:t>
+            </a:r>
+          </a:p>
+          <a:p>
+            <a:pPr>
+              <a:defRPr sz="1200" b="0">
+                <a:solidFill>
+                  <a:srgbClr val="F8FAFC"/>
+                </a:solidFill>
+                <a:latin typeface="Courier New"/>
+              </a:defRPr>
+            </a:pPr>
+            <a:r>
+              <a:rPr sz="1200" b="0">
+                <a:solidFill>
+                  <a:srgbClr val="F8FAFC"/>
+                </a:solidFill>
+                <a:latin typeface="Courier New"/>
+              </a:rPr>
+              <a:t>import tensorflow as tf</a:t>
+            </a:r>
+          </a:p>
+          <a:p>
+            <a:pPr>
+              <a:defRPr sz="1200" b="0">
+                <a:solidFill>
+                  <a:srgbClr val="F8FAFC"/>
+                </a:solidFill>
+                <a:latin typeface="Courier New"/>
+              </a:defRPr>
+            </a:pPr>
+            <a:r>
+              <a:rPr sz="1200" b="0">
+                <a:solidFill>
+                  <a:srgbClr val="F8FAFC"/>
+                </a:solidFill>
+                <a:latin typeface="Courier New"/>
+              </a:rPr>
+              <a:t>from tensorflow import keras</a:t>
+            </a:r>
+          </a:p>
+          <a:p>
+            <a:pPr>
+              <a:defRPr sz="1200" b="0">
+                <a:solidFill>
+                  <a:srgbClr val="F8FAFC"/>
+                </a:solidFill>
+                <a:latin typeface="Courier New"/>
+              </a:defRPr>
+            </a:pPr>
+            <a:r>
+              <a:rPr sz="1200" b="0">
+                <a:solidFill>
+                  <a:srgbClr val="F8FAFC"/>
+                </a:solidFill>
+                <a:latin typeface="Courier New"/>
+              </a:rPr>
+              <a:t>from tensorflow.keras import layers</a:t>
+            </a:r>
+          </a:p>
+          <a:p>
+            <a:pPr>
+              <a:defRPr sz="1200" b="0">
+                <a:solidFill>
+                  <a:srgbClr val="F8FAFC"/>
+                </a:solidFill>
+                <a:latin typeface="Courier New"/>
+              </a:defRPr>
+            </a:pPr>
+            <a:r>
+              <a:rPr sz="1200" b="0">
+                <a:solidFill>
+                  <a:srgbClr val="F8FAFC"/>
+                </a:solidFill>
+                <a:latin typeface="Courier New"/>
+              </a:rPr>
+              <a:t>keras.utils.set_random_seed(42)</a:t>
+            </a:r>
+          </a:p>
+          <a:p>
+            <a:pPr>
+              <a:defRPr sz="1200" b="0">
+                <a:solidFill>
+                  <a:srgbClr val="F8FAFC"/>
+                </a:solidFill>
+                <a:latin typeface="Courier New"/>
+              </a:defRPr>
+            </a:pPr>
+            <a:r>
+              <a:rPr sz="1200" b="0">
+                <a:solidFill>
+                  <a:srgbClr val="F8FAFC"/>
+                </a:solidFill>
+                <a:latin typeface="Courier New"/>
+              </a:rPr>
+              <a:t> </a:t>
+            </a:r>
+          </a:p>
+          <a:p>
+            <a:pPr>
+              <a:defRPr sz="1200" b="0">
+                <a:solidFill>
+                  <a:srgbClr val="F8FAFC"/>
+                </a:solidFill>
+                <a:latin typeface="Courier New"/>
+              </a:defRPr>
+            </a:pPr>
+            <a:r>
+              <a:rPr sz="1200" b="0">
+                <a:solidFill>
+                  <a:srgbClr val="F8FAFC"/>
+                </a:solidFill>
+                <a:latin typeface="Courier New"/>
+              </a:rPr>
+              <a:t># output = Capa(...)(input)  -&gt; permite cualquier DAG</a:t>
+            </a:r>
+          </a:p>
+          <a:p>
+            <a:pPr>
+              <a:defRPr sz="1200" b="0">
+                <a:solidFill>
+                  <a:srgbClr val="F8FAFC"/>
+                </a:solidFill>
+                <a:latin typeface="Courier New"/>
+              </a:defRPr>
+            </a:pPr>
+            <a:r>
+              <a:rPr sz="1200" b="0">
+                <a:solidFill>
+                  <a:srgbClr val="F8FAFC"/>
+                </a:solidFill>
+                <a:latin typeface="Courier New"/>
+              </a:rPr>
+              <a:t>inputs = keras.Input(shape=(8,))</a:t>
+            </a:r>
+          </a:p>
+          <a:p>
+            <a:pPr>
+              <a:defRPr sz="1200" b="0">
+                <a:solidFill>
+                  <a:srgbClr val="F8FAFC"/>
+                </a:solidFill>
+                <a:latin typeface="Courier New"/>
+              </a:defRPr>
+            </a:pPr>
+            <a:r>
+              <a:rPr sz="1200" b="0">
+                <a:solidFill>
+                  <a:srgbClr val="F8FAFC"/>
+                </a:solidFill>
+                <a:latin typeface="Courier New"/>
+              </a:rPr>
+              <a:t>x = layers.Dense(32, activation="relu")(inputs)</a:t>
+            </a:r>
+          </a:p>
+          <a:p>
+            <a:pPr>
+              <a:defRPr sz="1200" b="0">
+                <a:solidFill>
+                  <a:srgbClr val="F8FAFC"/>
+                </a:solidFill>
+                <a:latin typeface="Courier New"/>
+              </a:defRPr>
+            </a:pPr>
+            <a:r>
+              <a:rPr sz="1200" b="0">
+                <a:solidFill>
+                  <a:srgbClr val="F8FAFC"/>
+                </a:solidFill>
+                <a:latin typeface="Courier New"/>
+              </a:rPr>
+              <a:t>x = layers.Dense(16, activation="relu")(x)</a:t>
+            </a:r>
+          </a:p>
+          <a:p>
+            <a:pPr>
+              <a:defRPr sz="1200" b="0">
+                <a:solidFill>
+                  <a:srgbClr val="F8FAFC"/>
+                </a:solidFill>
+                <a:latin typeface="Courier New"/>
+              </a:defRPr>
+            </a:pPr>
+            <a:r>
+              <a:rPr sz="1200" b="0">
+                <a:solidFill>
+                  <a:srgbClr val="F8FAFC"/>
+                </a:solidFill>
+                <a:latin typeface="Courier New"/>
+              </a:rPr>
+              <a:t>outputs = layers.Dense(1)(x)</a:t>
+            </a:r>
+          </a:p>
+          <a:p>
+            <a:pPr>
+              <a:defRPr sz="1200" b="0">
+                <a:solidFill>
+                  <a:srgbClr val="F8FAFC"/>
+                </a:solidFill>
+                <a:latin typeface="Courier New"/>
+              </a:defRPr>
+            </a:pPr>
+            <a:r>
+              <a:rPr sz="1200" b="0">
+                <a:solidFill>
+                  <a:srgbClr val="F8FAFC"/>
+                </a:solidFill>
+                <a:latin typeface="Courier New"/>
+              </a:rPr>
+              <a:t>modelo = keras.Model(inputs=inputs, outputs=outputs, name="mlp_funcional")</a:t>
+            </a:r>
+          </a:p>
+          <a:p>
+            <a:pPr>
+              <a:defRPr sz="1200" b="0">
+                <a:solidFill>
+                  <a:srgbClr val="F8FAFC"/>
+                </a:solidFill>
+                <a:latin typeface="Courier New"/>
+              </a:defRPr>
+            </a:pPr>
+            <a:r>
+              <a:rPr sz="1200" b="0">
+                <a:solidFill>
+                  <a:srgbClr val="F8FAFC"/>
+                </a:solidFill>
+                <a:latin typeface="Courier New"/>
+              </a:rPr>
+              <a:t>print("capas:", [l.name for l in modelo.layers])</a:t>
+            </a:r>
+          </a:p>
+          <a:p>
+            <a:pPr>
+              <a:defRPr sz="1200" b="0">
+                <a:solidFill>
+                  <a:srgbClr val="F8FAFC"/>
+                </a:solidFill>
+                <a:latin typeface="Courier New"/>
+              </a:defRPr>
+            </a:pPr>
+            <a:r>
+              <a:rPr sz="1200" b="0">
+                <a:solidFill>
+                  <a:srgbClr val="F8FAFC"/>
+                </a:solidFill>
+                <a:latin typeface="Courier New"/>
+              </a:rPr>
+              <a:t>print("params:", modelo.count_params())</a:t>
             </a:r>
           </a:p>
         </p:txBody>

--- a/docs/presentaciones/classes/clase-103-keras-functional-api-y-subclassing-presentacion.pptx
+++ b/docs/presentaciones/classes/clase-103-keras-functional-api-y-subclassing-presentacion.pptx
@@ -3272,7 +3272,7 @@
                 </a:solidFill>
                 <a:latin typeface="Segoe UI"/>
               </a:rPr>
-              <a:t>Parte: 2 — Deep Learning · Fuente: Géron, cap. 10 § Building Complex Models Using the Functional API y § Building Dynamic Models Using the Subclassing API.  Duración estimada: 70 min.</a:t>
+              <a:t>Parte: 2 — Deep Learning · Fuente: Géron, cap. 10 § Building Complex Models Using the Functional API y § Building Dynamic Models Using the Subclassing API.  Duración estimada: 70 min. · Nivel: Avanzado</a:t>
             </a:r>
           </a:p>
         </p:txBody>
@@ -3581,7 +3581,7 @@
                 </a:solidFill>
                 <a:latin typeface="Segoe UI"/>
               </a:rPr>
-              <a:t>Parte: 2 — Deep Learning · Fuente: Géron, cap. 10 § Building Complex Models Using the Functional API y § Building Dynamic Models Using the Subclassing API.  Duración estimada: 70 min.</a:t>
+              <a:t>Parte: 2 — Deep Learning · Fuente: Géron, cap. 10 § Building Complex Models Using the Functional API y § Building Dynamic Models Using the Subclassing API.  Duración estimada: 70 min. · Nivel: Avanzado</a:t>
             </a:r>
           </a:p>
         </p:txBody>
